--- a/oyas/docs/montages.pptx
+++ b/oyas/docs/montages.pptx
@@ -264,7 +264,7 @@
           <a:p>
             <a:fld id="{87762C5B-391C-44AE-A314-84675F5D9C4A}" type="datetimeFigureOut">
               <a:rPr lang="fr-FR" smtClean="0"/>
-              <a:t>29/06/2025</a:t>
+              <a:t>23/05/2026</a:t>
             </a:fld>
             <a:endParaRPr lang="fr-FR"/>
           </a:p>
@@ -462,7 +462,7 @@
           <a:p>
             <a:fld id="{87762C5B-391C-44AE-A314-84675F5D9C4A}" type="datetimeFigureOut">
               <a:rPr lang="fr-FR" smtClean="0"/>
-              <a:t>29/06/2025</a:t>
+              <a:t>23/05/2026</a:t>
             </a:fld>
             <a:endParaRPr lang="fr-FR"/>
           </a:p>
@@ -670,7 +670,7 @@
           <a:p>
             <a:fld id="{87762C5B-391C-44AE-A314-84675F5D9C4A}" type="datetimeFigureOut">
               <a:rPr lang="fr-FR" smtClean="0"/>
-              <a:t>29/06/2025</a:t>
+              <a:t>23/05/2026</a:t>
             </a:fld>
             <a:endParaRPr lang="fr-FR"/>
           </a:p>
@@ -868,7 +868,7 @@
           <a:p>
             <a:fld id="{87762C5B-391C-44AE-A314-84675F5D9C4A}" type="datetimeFigureOut">
               <a:rPr lang="fr-FR" smtClean="0"/>
-              <a:t>29/06/2025</a:t>
+              <a:t>23/05/2026</a:t>
             </a:fld>
             <a:endParaRPr lang="fr-FR"/>
           </a:p>
@@ -1143,7 +1143,7 @@
           <a:p>
             <a:fld id="{87762C5B-391C-44AE-A314-84675F5D9C4A}" type="datetimeFigureOut">
               <a:rPr lang="fr-FR" smtClean="0"/>
-              <a:t>29/06/2025</a:t>
+              <a:t>23/05/2026</a:t>
             </a:fld>
             <a:endParaRPr lang="fr-FR"/>
           </a:p>
@@ -1408,7 +1408,7 @@
           <a:p>
             <a:fld id="{87762C5B-391C-44AE-A314-84675F5D9C4A}" type="datetimeFigureOut">
               <a:rPr lang="fr-FR" smtClean="0"/>
-              <a:t>29/06/2025</a:t>
+              <a:t>23/05/2026</a:t>
             </a:fld>
             <a:endParaRPr lang="fr-FR"/>
           </a:p>
@@ -1820,7 +1820,7 @@
           <a:p>
             <a:fld id="{87762C5B-391C-44AE-A314-84675F5D9C4A}" type="datetimeFigureOut">
               <a:rPr lang="fr-FR" smtClean="0"/>
-              <a:t>29/06/2025</a:t>
+              <a:t>23/05/2026</a:t>
             </a:fld>
             <a:endParaRPr lang="fr-FR"/>
           </a:p>
@@ -1961,7 +1961,7 @@
           <a:p>
             <a:fld id="{87762C5B-391C-44AE-A314-84675F5D9C4A}" type="datetimeFigureOut">
               <a:rPr lang="fr-FR" smtClean="0"/>
-              <a:t>29/06/2025</a:t>
+              <a:t>23/05/2026</a:t>
             </a:fld>
             <a:endParaRPr lang="fr-FR"/>
           </a:p>
@@ -2074,7 +2074,7 @@
           <a:p>
             <a:fld id="{87762C5B-391C-44AE-A314-84675F5D9C4A}" type="datetimeFigureOut">
               <a:rPr lang="fr-FR" smtClean="0"/>
-              <a:t>29/06/2025</a:t>
+              <a:t>23/05/2026</a:t>
             </a:fld>
             <a:endParaRPr lang="fr-FR"/>
           </a:p>
@@ -2385,7 +2385,7 @@
           <a:p>
             <a:fld id="{87762C5B-391C-44AE-A314-84675F5D9C4A}" type="datetimeFigureOut">
               <a:rPr lang="fr-FR" smtClean="0"/>
-              <a:t>29/06/2025</a:t>
+              <a:t>23/05/2026</a:t>
             </a:fld>
             <a:endParaRPr lang="fr-FR"/>
           </a:p>
@@ -2673,7 +2673,7 @@
           <a:p>
             <a:fld id="{87762C5B-391C-44AE-A314-84675F5D9C4A}" type="datetimeFigureOut">
               <a:rPr lang="fr-FR" smtClean="0"/>
-              <a:t>29/06/2025</a:t>
+              <a:t>23/05/2026</a:t>
             </a:fld>
             <a:endParaRPr lang="fr-FR"/>
           </a:p>
@@ -2914,7 +2914,7 @@
           <a:p>
             <a:fld id="{87762C5B-391C-44AE-A314-84675F5D9C4A}" type="datetimeFigureOut">
               <a:rPr lang="fr-FR" smtClean="0"/>
-              <a:t>29/06/2025</a:t>
+              <a:t>23/05/2026</a:t>
             </a:fld>
             <a:endParaRPr lang="fr-FR"/>
           </a:p>
@@ -5925,7 +5925,7 @@
         <p:spPr>
           <a:xfrm>
             <a:off x="2000168" y="3355826"/>
-            <a:ext cx="436338" cy="307777"/>
+            <a:ext cx="441146" cy="307777"/>
           </a:xfrm>
           <a:prstGeom prst="rect">
             <a:avLst/>
@@ -5940,7 +5940,7 @@
           <a:p>
             <a:r>
               <a:rPr lang="fr-FR" sz="1400" dirty="0"/>
-              <a:t>@2</a:t>
+              <a:t>@3</a:t>
             </a:r>
           </a:p>
         </p:txBody>
@@ -5960,7 +5960,7 @@
         <p:spPr>
           <a:xfrm>
             <a:off x="2000168" y="2585242"/>
-            <a:ext cx="436338" cy="307777"/>
+            <a:ext cx="441146" cy="307777"/>
           </a:xfrm>
           <a:prstGeom prst="rect">
             <a:avLst/>
@@ -5975,7 +5975,7 @@
           <a:p>
             <a:r>
               <a:rPr lang="fr-FR" sz="1400" dirty="0"/>
-              <a:t>@3</a:t>
+              <a:t>@2</a:t>
             </a:r>
           </a:p>
         </p:txBody>
